--- a/budget-transfer/kickoff/IT_Budget_Transfer_Kickoff_2026-11-02_EN.pptx
+++ b/budget-transfer/kickoff/IT_Budget_Transfer_Kickoff_2026-11-02_EN.pptx
@@ -13,6 +13,7 @@
     <p:sldId id="261" r:id="rId7"/>
     <p:sldId id="262" r:id="rId8"/>
     <p:sldId id="263" r:id="rId9"/>
+    <p:sldId id="264" r:id="rId15"/>
   </p:sldIdLst>
   <p:notesMasterIdLst>
     <p:notesMasterId r:id="rId10"/>
@@ -8748,79 +8749,6 @@
       </p:sp>
       <p:sp>
         <p:nvSpPr>
-          <p:cNvPr id="48" name="noteline-191"/>
-          <p:cNvSpPr/>
-          <p:nvPr/>
-        </p:nvSpPr>
-        <p:spPr>
-          <a:xfrm>
-            <a:off x="457200" y="5870448"/>
-            <a:ext cx="11274552" cy="0"/>
-          </a:xfrm>
-          <a:prstGeom prst="line">
-            <a:avLst/>
-          </a:prstGeom>
-          <a:noFill/>
-          <a:ln w="9525">
-            <a:solidFill>
-              <a:schemeClr val="accent3"/>
-            </a:solidFill>
-            <a:prstDash val="solid"/>
-          </a:ln>
-        </p:spPr>
-      </p:sp>
-      <p:sp>
-        <p:nvSpPr>
-          <p:cNvPr id="49" name="txt-192"/>
-          <p:cNvSpPr txBox="1"/>
-          <p:nvPr/>
-        </p:nvSpPr>
-        <p:spPr>
-          <a:xfrm>
-            <a:off x="457200" y="5961888"/>
-            <a:ext cx="11274552" cy="411480"/>
-          </a:xfrm>
-          <a:prstGeom prst="rect">
-            <a:avLst/>
-          </a:prstGeom>
-          <a:noFill/>
-          <a:ln/>
-        </p:spPr>
-        <p:txBody>
-          <a:bodyPr wrap="square" lIns="0" tIns="0" rIns="0" bIns="0" rtlCol="0" anchor="t"/>
-          <a:lstStyle/>
-          <a:p>
-            <a:pPr indent="0" marL="0">
-              <a:buNone/>
-            </a:pPr>
-            <a:r>
-              <a:rPr lang="en-US" sz="900" dirty="0">
-                <a:solidFill>
-                  <a:schemeClr val="accent2"/>
-                </a:solidFill>
-              </a:rPr>
-              <a:t>Reference (GxP): EU GMP Annex 11 (2011; 2025 draft revision), PIC/S PI 011-3, MHLW Guideline on Management of Computerized Systems</a:t>
-            </a:r>
-            <a:endParaRPr lang="en-US" sz="900" dirty="0"/>
-          </a:p>
-          <a:p>
-            <a:pPr indent="0" marL="0">
-              <a:buNone/>
-            </a:pPr>
-            <a:r>
-              <a:rPr lang="en-US" sz="900" dirty="0">
-                <a:solidFill>
-                  <a:schemeClr val="accent2"/>
-                </a:solidFill>
-              </a:rPr>
-              <a:t>Reference (internal control): FSA Standards and Practice Standards for Management Assessment and Audit of ICFR; METI System Management Standards Supplement (IT Control Guidance for Financial Reporting) and System Management Standards</a:t>
-            </a:r>
-            <a:endParaRPr lang="en-US" sz="900" dirty="0"/>
-          </a:p>
-        </p:txBody>
-      </p:sp>
-      <p:sp>
-        <p:nvSpPr>
           <p:cNvPr id="25" name="Slide Number Placeholder 0"/>
           <p:cNvSpPr>
             <a:spLocks noGrp="1"/>
@@ -20623,6 +20551,815 @@
             <a:fld id="{F7021451-1387-4CA6-816F-3879F97B5CBC}" type="slidenum">
               <a:rPr b="0" lang="en-US"/>
               <a:t>8</a:t>
+            </a:fld>
+            <a:endParaRPr lang="en-US"/>
+          </a:p>
+        </p:txBody>
+      </p:sp>
+    </p:spTree>
+  </p:cSld>
+  <p:clrMapOvr>
+    <a:masterClrMapping/>
+  </p:clrMapOvr>
+</p:sld>
+</file>
+
+<file path=ppt/slides/slide9.xml><?xml version="1.0" encoding="utf-8"?>
+<p:sld xmlns:a="http://schemas.openxmlformats.org/drawingml/2006/main" xmlns:p="http://schemas.openxmlformats.org/presentationml/2006/main" xmlns:r="http://schemas.openxmlformats.org/officeDocument/2006/relationships">
+  <p:cSld>
+    <p:spTree>
+      <p:nvGrpSpPr>
+        <p:cNvPr id="1" name=""/>
+        <p:cNvGrpSpPr/>
+        <p:nvPr/>
+      </p:nvGrpSpPr>
+      <p:grpSpPr/>
+      <p:sp>
+        <p:nvSpPr>
+          <p:cNvPr id="101" name="Text 0"/>
+          <p:cNvSpPr/>
+          <p:nvPr>
+            <p:ph idx="100" type="title" hasCustomPrompt="1"/>
+          </p:nvPr>
+        </p:nvSpPr>
+        <p:spPr>
+          <a:xfrm>
+            <a:off x="457200" y="274320"/>
+            <a:ext cx="11274552" cy="594360"/>
+          </a:xfrm>
+          <a:prstGeom prst="rect">
+            <a:avLst/>
+          </a:prstGeom>
+          <a:noFill/>
+          <a:ln/>
+        </p:spPr>
+        <p:txBody>
+          <a:bodyPr wrap="square" lIns="0" tIns="0" rIns="0" bIns="0" rtlCol="0" anchor="ctr"/>
+          <a:lstStyle/>
+          <a:p>
+            <a:pPr algn="l" indent="0" marL="0">
+              <a:buNone/>
+            </a:pPr>
+            <a:r>
+              <a:rPr lang="en-US" sz="2600" b="1" dirty="0">
+                <a:solidFill>
+                  <a:schemeClr val="tx2"/>
+                </a:solidFill>
+              </a:rPr>
+              <a:t>Proposal: hold the IT budget "split"</a:t>
+            </a:r>
+            <a:endParaRPr lang="en-US" sz="2600" dirty="0"/>
+          </a:p>
+        </p:txBody>
+      </p:sp>
+      <p:sp>
+        <p:nvSpPr>
+          <p:cNvPr id="102" name="txt-146"/>
+          <p:cNvSpPr txBox="1"/>
+          <p:nvPr/>
+        </p:nvSpPr>
+        <p:spPr>
+          <a:xfrm>
+            <a:off x="457200" y="914400"/>
+            <a:ext cx="11274552" cy="457200"/>
+          </a:xfrm>
+          <a:prstGeom prst="rect">
+            <a:avLst/>
+          </a:prstGeom>
+          <a:noFill/>
+          <a:ln/>
+        </p:spPr>
+        <p:txBody>
+          <a:bodyPr wrap="square" lIns="0" tIns="0" rIns="0" bIns="0" rtlCol="0" anchor="ctr"/>
+          <a:lstStyle/>
+          <a:p>
+            <a:pPr indent="0" marL="0">
+              <a:buNone/>
+            </a:pPr>
+            <a:r>
+              <a:rPr lang="en-US" sz="1300" b="1" dirty="0">
+                <a:solidFill>
+                  <a:schemeClr val="tx2"/>
+                </a:solidFill>
+              </a:rPr>
+              <a:t>Not "business or IT". Money, contracts and paperwork go to IT; accountability (A) for the business stays with the business. Four conditions make it work</a:t>
+            </a:r>
+            <a:endParaRPr lang="en-US" sz="1400" dirty="0"/>
+          </a:p>
+        </p:txBody>
+      </p:sp>
+      <p:sp>
+        <p:nvSpPr>
+          <p:cNvPr id="103" name="box-18"/>
+          <p:cNvSpPr/>
+          <p:nvPr/>
+        </p:nvSpPr>
+        <p:spPr>
+          <a:xfrm>
+            <a:off x="457200" y="1536192"/>
+            <a:ext cx="5545836" cy="2395728"/>
+          </a:xfrm>
+          <a:prstGeom prst="rect">
+            <a:avLst/>
+          </a:prstGeom>
+          <a:solidFill>
+            <a:schemeClr val="bg2"/>
+          </a:solidFill>
+          <a:ln/>
+        </p:spPr>
+      </p:sp>
+      <p:sp>
+        <p:nvSpPr>
+          <p:cNvPr id="104" name="txt-19"/>
+          <p:cNvSpPr txBox="1"/>
+          <p:nvPr/>
+        </p:nvSpPr>
+        <p:spPr>
+          <a:xfrm>
+            <a:off x="658368" y="1673351"/>
+            <a:ext cx="5143500" cy="329184"/>
+          </a:xfrm>
+          <a:prstGeom prst="rect">
+            <a:avLst/>
+          </a:prstGeom>
+          <a:noFill/>
+          <a:ln/>
+        </p:spPr>
+        <p:txBody>
+          <a:bodyPr wrap="square" lIns="0" tIns="0" rIns="0" bIns="0" rtlCol="0" anchor="t"/>
+          <a:lstStyle/>
+          <a:p>
+            <a:pPr indent="0" marL="0">
+              <a:buNone/>
+            </a:pPr>
+            <a:r>
+              <a:rPr lang="en-US" sz="1500" b="1" dirty="0">
+                <a:solidFill>
+                  <a:schemeClr val="tx2"/>
+                </a:solidFill>
+              </a:rPr>
+              <a:t>1.  Why separate budget and accountability</a:t>
+            </a:r>
+            <a:endParaRPr lang="en-US" sz="1500" dirty="0"/>
+          </a:p>
+        </p:txBody>
+      </p:sp>
+      <p:sp>
+        <p:nvSpPr>
+          <p:cNvPr id="105" name="txt-20"/>
+          <p:cNvSpPr txBox="1"/>
+          <p:nvPr/>
+        </p:nvSpPr>
+        <p:spPr>
+          <a:xfrm>
+            <a:off x="658368" y="2020824"/>
+            <a:ext cx="5143500" cy="274320"/>
+          </a:xfrm>
+          <a:prstGeom prst="rect">
+            <a:avLst/>
+          </a:prstGeom>
+          <a:noFill/>
+          <a:ln/>
+        </p:spPr>
+        <p:txBody>
+          <a:bodyPr wrap="square" lIns="0" tIns="0" rIns="0" bIns="0" rtlCol="0" anchor="t"/>
+          <a:lstStyle/>
+          <a:p>
+            <a:pPr indent="0" marL="0">
+              <a:buNone/>
+            </a:pPr>
+            <a:r>
+              <a:rPr lang="en-US" sz="1200" b="1" dirty="0">
+                <a:solidFill>
+                  <a:schemeClr val="accent2"/>
+                </a:solidFill>
+              </a:rPr>
+              <a:t>Money flows through IT; business decisions stay with the business</a:t>
+            </a:r>
+            <a:endParaRPr lang="en-US" sz="1100" dirty="0"/>
+          </a:p>
+        </p:txBody>
+      </p:sp>
+      <p:sp>
+        <p:nvSpPr>
+          <p:cNvPr id="106" name="txt-21"/>
+          <p:cNvSpPr txBox="1"/>
+          <p:nvPr/>
+        </p:nvSpPr>
+        <p:spPr>
+          <a:xfrm>
+            <a:off x="658368" y="2377440"/>
+            <a:ext cx="5143500" cy="1481328"/>
+          </a:xfrm>
+          <a:prstGeom prst="rect">
+            <a:avLst/>
+          </a:prstGeom>
+          <a:noFill/>
+          <a:ln/>
+        </p:spPr>
+        <p:txBody>
+          <a:bodyPr wrap="square" lIns="0" tIns="0" rIns="0" bIns="0" rtlCol="0" anchor="t"/>
+          <a:lstStyle/>
+          <a:p>
+            <a:pPr marL="152400" indent="-152400">
+              <a:spcAft>
+                <a:spcPts val="300"/>
+              </a:spcAft>
+              <a:buSzPct val="100000"/>
+              <a:buChar char="•"/>
+            </a:pPr>
+            <a:r>
+              <a:rPr lang="en-US" sz="1150" dirty="0">
+                <a:solidFill>
+                  <a:schemeClr val="tx1"/>
+                </a:solidFill>
+              </a:rPr>
+              <a:t>IT holds budget, contracts and indirect work: to control impact on shared foundations, gain negotiating power with vendors, remove duplication and make IT spend visible company-wide</a:t>
+            </a:r>
+            <a:endParaRPr lang="en-US" sz="1100" dirty="0"/>
+          </a:p>
+          <a:p>
+            <a:pPr marL="152400" indent="-152400">
+              <a:spcAft>
+                <a:spcPts val="300"/>
+              </a:spcAft>
+              <a:buSzPct val="100000"/>
+              <a:buChar char="•"/>
+            </a:pPr>
+            <a:r>
+              <a:rPr lang="en-US" sz="1150" dirty="0">
+                <a:solidFill>
+                  <a:schemeClr val="tx1"/>
+                </a:solidFill>
+              </a:rPr>
+              <a:t>Only the business can judge the need, requirements and acceptance of a business application. A stays with the business (process owner principle)</a:t>
+            </a:r>
+            <a:endParaRPr lang="en-US" sz="1100" dirty="0"/>
+          </a:p>
+          <a:p>
+            <a:pPr marL="152400" indent="-152400">
+              <a:spcAft>
+                <a:spcPts val="300"/>
+              </a:spcAft>
+              <a:buSzPct val="100000"/>
+              <a:buChar char="•"/>
+            </a:pPr>
+            <a:r>
+              <a:rPr lang="en-US" sz="1150" dirty="0">
+                <a:solidFill>
+                  <a:schemeClr val="tx1"/>
+                </a:solidFill>
+              </a:rPr>
+              <a:t>The question is not "who holds the budget" but "who holds what"</a:t>
+            </a:r>
+            <a:endParaRPr lang="en-US" sz="1100" dirty="0"/>
+          </a:p>
+        </p:txBody>
+      </p:sp>
+      <p:sp>
+        <p:nvSpPr>
+          <p:cNvPr id="107" name="box-18"/>
+          <p:cNvSpPr/>
+          <p:nvPr/>
+        </p:nvSpPr>
+        <p:spPr>
+          <a:xfrm>
+            <a:off x="6185916" y="1536192"/>
+            <a:ext cx="5545836" cy="2395728"/>
+          </a:xfrm>
+          <a:prstGeom prst="rect">
+            <a:avLst/>
+          </a:prstGeom>
+          <a:solidFill>
+            <a:schemeClr val="bg2"/>
+          </a:solidFill>
+          <a:ln/>
+        </p:spPr>
+      </p:sp>
+      <p:sp>
+        <p:nvSpPr>
+          <p:cNvPr id="108" name="txt-19"/>
+          <p:cNvSpPr txBox="1"/>
+          <p:nvPr/>
+        </p:nvSpPr>
+        <p:spPr>
+          <a:xfrm>
+            <a:off x="6387084" y="1673351"/>
+            <a:ext cx="5143500" cy="329184"/>
+          </a:xfrm>
+          <a:prstGeom prst="rect">
+            <a:avLst/>
+          </a:prstGeom>
+          <a:noFill/>
+          <a:ln/>
+        </p:spPr>
+        <p:txBody>
+          <a:bodyPr wrap="square" lIns="0" tIns="0" rIns="0" bIns="0" rtlCol="0" anchor="t"/>
+          <a:lstStyle/>
+          <a:p>
+            <a:pPr indent="0" marL="0">
+              <a:buNone/>
+            </a:pPr>
+            <a:r>
+              <a:rPr lang="en-US" sz="1500" b="1" dirty="0">
+                <a:solidFill>
+                  <a:schemeClr val="tx2"/>
+                </a:solidFill>
+              </a:rPr>
+              <a:t>2.  Who allocates</a:t>
+            </a:r>
+            <a:endParaRPr lang="en-US" sz="1500" dirty="0"/>
+          </a:p>
+        </p:txBody>
+      </p:sp>
+      <p:sp>
+        <p:nvSpPr>
+          <p:cNvPr id="109" name="txt-20"/>
+          <p:cNvSpPr txBox="1"/>
+          <p:nvPr/>
+        </p:nvSpPr>
+        <p:spPr>
+          <a:xfrm>
+            <a:off x="6387084" y="2020824"/>
+            <a:ext cx="5143500" cy="274320"/>
+          </a:xfrm>
+          <a:prstGeom prst="rect">
+            <a:avLst/>
+          </a:prstGeom>
+          <a:noFill/>
+          <a:ln/>
+        </p:spPr>
+        <p:txBody>
+          <a:bodyPr wrap="square" lIns="0" tIns="0" rIns="0" bIns="0" rtlCol="0" anchor="t"/>
+          <a:lstStyle/>
+          <a:p>
+            <a:pPr indent="0" marL="0">
+              <a:buNone/>
+            </a:pPr>
+            <a:r>
+              <a:rPr lang="en-US" sz="1200" b="1" dirty="0">
+                <a:solidFill>
+                  <a:schemeClr val="accent2"/>
+                </a:solidFill>
+              </a:rPr>
+              <a:t>The company sets the envelope; the business sets priorities within it</a:t>
+            </a:r>
+            <a:endParaRPr lang="en-US" sz="1100" dirty="0"/>
+          </a:p>
+        </p:txBody>
+      </p:sp>
+      <p:sp>
+        <p:nvSpPr>
+          <p:cNvPr id="110" name="txt-21"/>
+          <p:cNvSpPr txBox="1"/>
+          <p:nvPr/>
+        </p:nvSpPr>
+        <p:spPr>
+          <a:xfrm>
+            <a:off x="6387084" y="2377440"/>
+            <a:ext cx="5143500" cy="1481328"/>
+          </a:xfrm>
+          <a:prstGeom prst="rect">
+            <a:avLst/>
+          </a:prstGeom>
+          <a:noFill/>
+          <a:ln/>
+        </p:spPr>
+        <p:txBody>
+          <a:bodyPr wrap="square" lIns="0" tIns="0" rIns="0" bIns="0" rtlCol="0" anchor="t"/>
+          <a:lstStyle/>
+          <a:p>
+            <a:pPr marL="152400" indent="-152400">
+              <a:spcAft>
+                <a:spcPts val="300"/>
+              </a:spcAft>
+              <a:buSzPct val="100000"/>
+              <a:buChar char="•"/>
+            </a:pPr>
+            <a:r>
+              <a:rPr lang="en-US" sz="1150" dirty="0">
+                <a:solidFill>
+                  <a:schemeClr val="tx1"/>
+                </a:solidFill>
+              </a:rPr>
+              <a:t>Department envelopes and investment approval are decided by the new IT governance (Tier)</a:t>
+            </a:r>
+            <a:endParaRPr lang="en-US" sz="1100" dirty="0"/>
+          </a:p>
+          <a:p>
+            <a:pPr marL="152400" indent="-152400">
+              <a:spcAft>
+                <a:spcPts val="300"/>
+              </a:spcAft>
+              <a:buSzPct val="100000"/>
+              <a:buChar char="•"/>
+            </a:pPr>
+            <a:r>
+              <a:rPr lang="en-US" sz="1150" dirty="0">
+                <a:solidFill>
+                  <a:schemeClr val="tx1"/>
+                </a:solidFill>
+              </a:rPr>
+              <a:t>Within the envelope, the business owner (BO) decides which cases come first</a:t>
+            </a:r>
+            <a:endParaRPr lang="en-US" sz="1100" dirty="0"/>
+          </a:p>
+          <a:p>
+            <a:pPr marL="152400" indent="-152400">
+              <a:spcAft>
+                <a:spcPts val="300"/>
+              </a:spcAft>
+              <a:buSzPct val="100000"/>
+              <a:buChar char="•"/>
+            </a:pPr>
+            <a:r>
+              <a:rPr lang="en-US" sz="1150" dirty="0">
+                <a:solidFill>
+                  <a:schemeClr val="tx1"/>
+                </a:solidFill>
+              </a:rPr>
+              <a:t>IT (SO) assesses cost and fit with existing systems and may object. If no agreement, escalate to Tier (IT does not block on its own)</a:t>
+            </a:r>
+            <a:endParaRPr lang="en-US" sz="1100" dirty="0"/>
+          </a:p>
+        </p:txBody>
+      </p:sp>
+      <p:sp>
+        <p:nvSpPr>
+          <p:cNvPr id="111" name="box-18"/>
+          <p:cNvSpPr/>
+          <p:nvPr/>
+        </p:nvSpPr>
+        <p:spPr>
+          <a:xfrm>
+            <a:off x="457200" y="4069080"/>
+            <a:ext cx="5545836" cy="2395728"/>
+          </a:xfrm>
+          <a:prstGeom prst="rect">
+            <a:avLst/>
+          </a:prstGeom>
+          <a:solidFill>
+            <a:schemeClr val="bg2"/>
+          </a:solidFill>
+          <a:ln/>
+        </p:spPr>
+      </p:sp>
+      <p:sp>
+        <p:nvSpPr>
+          <p:cNvPr id="112" name="txt-19"/>
+          <p:cNvSpPr txBox="1"/>
+          <p:nvPr/>
+        </p:nvSpPr>
+        <p:spPr>
+          <a:xfrm>
+            <a:off x="658368" y="4206240"/>
+            <a:ext cx="5143500" cy="329184"/>
+          </a:xfrm>
+          <a:prstGeom prst="rect">
+            <a:avLst/>
+          </a:prstGeom>
+          <a:noFill/>
+          <a:ln/>
+        </p:spPr>
+        <p:txBody>
+          <a:bodyPr wrap="square" lIns="0" tIns="0" rIns="0" bIns="0" rtlCol="0" anchor="t"/>
+          <a:lstStyle/>
+          <a:p>
+            <a:pPr indent="0" marL="0">
+              <a:buNone/>
+            </a:pPr>
+            <a:r>
+              <a:rPr lang="en-US" sz="1500" b="1" dirty="0">
+                <a:solidFill>
+                  <a:schemeClr val="tx2"/>
+                </a:solidFill>
+              </a:rPr>
+              <a:t>3.  Keeping cost awareness</a:t>
+            </a:r>
+            <a:endParaRPr lang="en-US" sz="1500" dirty="0"/>
+          </a:p>
+        </p:txBody>
+      </p:sp>
+      <p:sp>
+        <p:nvSpPr>
+          <p:cNvPr id="113" name="txt-20"/>
+          <p:cNvSpPr txBox="1"/>
+          <p:nvPr/>
+        </p:nvSpPr>
+        <p:spPr>
+          <a:xfrm>
+            <a:off x="658368" y="4553712"/>
+            <a:ext cx="5143500" cy="274320"/>
+          </a:xfrm>
+          <a:prstGeom prst="rect">
+            <a:avLst/>
+          </a:prstGeom>
+          <a:noFill/>
+          <a:ln/>
+        </p:spPr>
+        <p:txBody>
+          <a:bodyPr wrap="square" lIns="0" tIns="0" rIns="0" bIns="0" rtlCol="0" anchor="t"/>
+          <a:lstStyle/>
+          <a:p>
+            <a:pPr indent="0" marL="0">
+              <a:buNone/>
+            </a:pPr>
+            <a:r>
+              <a:rPr lang="en-US" sz="1200" b="1" dirty="0">
+                <a:solidFill>
+                  <a:schemeClr val="accent2"/>
+                </a:solidFill>
+              </a:rPr>
+              <a:t>Departments no longer pay, but they still see what they use</a:t>
+            </a:r>
+            <a:endParaRPr lang="en-US" sz="1100" dirty="0"/>
+          </a:p>
+        </p:txBody>
+      </p:sp>
+      <p:sp>
+        <p:nvSpPr>
+          <p:cNvPr id="114" name="txt-21"/>
+          <p:cNvSpPr txBox="1"/>
+          <p:nvPr/>
+        </p:nvSpPr>
+        <p:spPr>
+          <a:xfrm>
+            <a:off x="658368" y="4910328"/>
+            <a:ext cx="5143500" cy="1481328"/>
+          </a:xfrm>
+          <a:prstGeom prst="rect">
+            <a:avLst/>
+          </a:prstGeom>
+          <a:noFill/>
+          <a:ln/>
+        </p:spPr>
+        <p:txBody>
+          <a:bodyPr wrap="square" lIns="0" tIns="0" rIns="0" bIns="0" rtlCol="0" anchor="t"/>
+          <a:lstStyle/>
+          <a:p>
+            <a:pPr marL="152400" indent="-152400">
+              <a:spcAft>
+                <a:spcPts val="300"/>
+              </a:spcAft>
+              <a:buSzPct val="100000"/>
+              <a:buChar char="•"/>
+            </a:pPr>
+            <a:r>
+              <a:rPr lang="en-US" sz="1150" dirty="0">
+                <a:solidFill>
+                  <a:schemeClr val="tx1"/>
+                </a:solidFill>
+              </a:rPr>
+              <a:t>Show transferred costs by department and case every period (unit prices and breakdown)</a:t>
+            </a:r>
+            <a:endParaRPr lang="en-US" sz="1100" dirty="0"/>
+          </a:p>
+          <a:p>
+            <a:pPr marL="152400" indent="-152400">
+              <a:spcAft>
+                <a:spcPts val="300"/>
+              </a:spcAft>
+              <a:buSzPct val="100000"/>
+              <a:buChar char="•"/>
+            </a:pPr>
+            <a:r>
+              <a:rPr lang="en-US" sz="1150" dirty="0">
+                <a:solidFill>
+                  <a:schemeClr val="tx1"/>
+                </a:solidFill>
+              </a:rPr>
+              <a:t>Return part of the savings to the department (ratio TBD)</a:t>
+            </a:r>
+            <a:endParaRPr lang="en-US" sz="1100" dirty="0"/>
+          </a:p>
+          <a:p>
+            <a:pPr marL="152400" indent="-152400">
+              <a:spcAft>
+                <a:spcPts val="300"/>
+              </a:spcAft>
+              <a:buSzPct val="100000"/>
+              <a:buChar char="•"/>
+            </a:pPr>
+            <a:r>
+              <a:rPr lang="en-US" sz="1150" dirty="0">
+                <a:solidFill>
+                  <a:schemeClr val="tx1"/>
+                </a:solidFill>
+              </a:rPr>
+              <a:t>Decide on allocation or chargeback after one year of actuals</a:t>
+            </a:r>
+            <a:endParaRPr lang="en-US" sz="1100" dirty="0"/>
+          </a:p>
+        </p:txBody>
+      </p:sp>
+      <p:sp>
+        <p:nvSpPr>
+          <p:cNvPr id="115" name="box-18"/>
+          <p:cNvSpPr/>
+          <p:nvPr/>
+        </p:nvSpPr>
+        <p:spPr>
+          <a:xfrm>
+            <a:off x="6185916" y="4069080"/>
+            <a:ext cx="5545836" cy="2395728"/>
+          </a:xfrm>
+          <a:prstGeom prst="rect">
+            <a:avLst/>
+          </a:prstGeom>
+          <a:solidFill>
+            <a:schemeClr val="bg2"/>
+          </a:solidFill>
+          <a:ln/>
+        </p:spPr>
+      </p:sp>
+      <p:sp>
+        <p:nvSpPr>
+          <p:cNvPr id="116" name="txt-19"/>
+          <p:cNvSpPr txBox="1"/>
+          <p:nvPr/>
+        </p:nvSpPr>
+        <p:spPr>
+          <a:xfrm>
+            <a:off x="6387084" y="4206240"/>
+            <a:ext cx="5143500" cy="329184"/>
+          </a:xfrm>
+          <a:prstGeom prst="rect">
+            <a:avLst/>
+          </a:prstGeom>
+          <a:noFill/>
+          <a:ln/>
+        </p:spPr>
+        <p:txBody>
+          <a:bodyPr wrap="square" lIns="0" tIns="0" rIns="0" bIns="0" rtlCol="0" anchor="t"/>
+          <a:lstStyle/>
+          <a:p>
+            <a:pPr indent="0" marL="0">
+              <a:buNone/>
+            </a:pPr>
+            <a:r>
+              <a:rPr lang="en-US" sz="1500" b="1" dirty="0">
+                <a:solidFill>
+                  <a:schemeClr val="tx2"/>
+                </a:solidFill>
+              </a:rPr>
+              <a:t>4.  Deadline for the middle layer</a:t>
+            </a:r>
+            <a:endParaRPr lang="en-US" sz="1500" dirty="0"/>
+          </a:p>
+        </p:txBody>
+      </p:sp>
+      <p:sp>
+        <p:nvSpPr>
+          <p:cNvPr id="117" name="txt-20"/>
+          <p:cNvSpPr txBox="1"/>
+          <p:nvPr/>
+        </p:nvSpPr>
+        <p:spPr>
+          <a:xfrm>
+            <a:off x="6387084" y="4553712"/>
+            <a:ext cx="5143500" cy="274320"/>
+          </a:xfrm>
+          <a:prstGeom prst="rect">
+            <a:avLst/>
+          </a:prstGeom>
+          <a:noFill/>
+          <a:ln/>
+        </p:spPr>
+        <p:txBody>
+          <a:bodyPr wrap="square" lIns="0" tIns="0" rIns="0" bIns="0" rtlCol="0" anchor="t"/>
+          <a:lstStyle/>
+          <a:p>
+            <a:pPr indent="0" marL="0">
+              <a:buNone/>
+            </a:pPr>
+            <a:r>
+              <a:rPr lang="en-US" sz="1200" b="1" dirty="0">
+                <a:solidFill>
+                  <a:schemeClr val="accent2"/>
+                </a:solidFill>
+              </a:rPr>
+              <a:t>Move R for IT-related work to IT by a set date</a:t>
+            </a:r>
+            <a:endParaRPr lang="en-US" sz="1100" dirty="0"/>
+          </a:p>
+        </p:txBody>
+      </p:sp>
+      <p:sp>
+        <p:nvSpPr>
+          <p:cNvPr id="118" name="txt-21"/>
+          <p:cNvSpPr txBox="1"/>
+          <p:nvPr/>
+        </p:nvSpPr>
+        <p:spPr>
+          <a:xfrm>
+            <a:off x="6387084" y="4910328"/>
+            <a:ext cx="5143500" cy="1481328"/>
+          </a:xfrm>
+          <a:prstGeom prst="rect">
+            <a:avLst/>
+          </a:prstGeom>
+          <a:noFill/>
+          <a:ln/>
+        </p:spPr>
+        <p:txBody>
+          <a:bodyPr wrap="square" lIns="0" tIns="0" rIns="0" bIns="0" rtlCol="0" anchor="t"/>
+          <a:lstStyle/>
+          <a:p>
+            <a:pPr marL="152400" indent="-152400">
+              <a:spcAft>
+                <a:spcPts val="300"/>
+              </a:spcAft>
+              <a:buSzPct val="100000"/>
+              <a:buChar char="•"/>
+            </a:pPr>
+            <a:r>
+              <a:rPr lang="en-US" sz="1150" dirty="0">
+                <a:solidFill>
+                  <a:schemeClr val="tx1"/>
+                </a:solidFill>
+              </a:rPr>
+              <a:t>Cap when SO starts taking R (e.g. next contract renewal, end of FY2027 at the latest)</a:t>
+            </a:r>
+            <a:endParaRPr lang="en-US" sz="1100" dirty="0"/>
+          </a:p>
+          <a:p>
+            <a:pPr marL="152400" indent="-152400">
+              <a:spcAft>
+                <a:spcPts val="300"/>
+              </a:spcAft>
+              <a:buSzPct val="100000"/>
+              <a:buChar char="•"/>
+            </a:pPr>
+            <a:r>
+              <a:rPr lang="en-US" sz="1150" dirty="0">
+                <a:solidFill>
+                  <a:schemeClr val="tx1"/>
+                </a:solidFill>
+              </a:rPr>
+              <a:t>Work left as Before past the cap needs a reason in the agreement document; the lead checks all cases side by side</a:t>
+            </a:r>
+            <a:endParaRPr lang="en-US" sz="1100" dirty="0"/>
+          </a:p>
+          <a:p>
+            <a:pPr marL="152400" indent="-152400">
+              <a:spcAft>
+                <a:spcPts val="300"/>
+              </a:spcAft>
+              <a:buSzPct val="100000"/>
+              <a:buChar char="•"/>
+            </a:pPr>
+            <a:r>
+              <a:rPr lang="en-US" sz="1150" dirty="0">
+                <a:solidFill>
+                  <a:schemeClr val="tx1"/>
+                </a:solidFill>
+              </a:rPr>
+              <a:t>Without a cap, only the books and paperwork move and the control objective is not met</a:t>
+            </a:r>
+            <a:endParaRPr lang="en-US" sz="1100" dirty="0"/>
+          </a:p>
+        </p:txBody>
+      </p:sp>
+      <p:sp>
+        <p:nvSpPr>
+          <p:cNvPr id="119" name="Slide Number Placeholder 0"/>
+          <p:cNvSpPr>
+            <a:spLocks noGrp="1"/>
+          </p:cNvSpPr>
+          <p:nvPr>
+            <p:ph type="sldNum" sz="quarter" idx="4294967295"/>
+          </p:nvPr>
+        </p:nvSpPr>
+        <p:spPr>
+          <a:xfrm>
+            <a:off x="11274552" y="6446520"/>
+            <a:ext cx="457200" cy="274320"/>
+          </a:xfrm>
+          <a:prstGeom prst="rect">
+            <a:avLst/>
+          </a:prstGeom>
+          <a:extLst>
+            <a:ext uri="{C572A759-6A51-4108-AA02-DFA0A04FC94B}">
+              <ma14:wrappingTextBoxFlag xmlns:ma14="http://schemas.microsoft.com/office/mac/drawingml/2011/main" val="0"/>
+            </a:ext>
+          </a:extLst>
+        </p:spPr>
+        <p:txBody>
+          <a:bodyPr/>
+          <a:lstStyle>
+            <a:lvl1pPr>
+              <a:defRPr sz="900">
+                <a:solidFill>
+                  <a:schemeClr val="accent3"/>
+                </a:solidFill>
+              </a:defRPr>
+            </a:lvl1pPr>
+          </a:lstStyle>
+          <a:p>
+            <a:pPr algn="r"/>
+            <a:fld id="{F7021451-1387-4CA6-816F-3879F97B5CBC}" type="slidenum">
+              <a:rPr b="0" lang="en-US"/>
+              <a:t>9</a:t>
             </a:fld>
             <a:endParaRPr lang="en-US"/>
           </a:p>
